--- a/assets/pptx/catalog-497.pptx
+++ b/assets/pptx/catalog-497.pptx
@@ -3313,7 +3313,7 @@
                 <a:ea typeface="Ebrima"/>
                 <a:cs typeface="Ebrima"/>
               </a:rPr>
-              <a:t>አይተናል አዎ ውበት ሲረግፍ (2x)</a:t>
+              <a:t>አይተናል አዎ ውበት ሲረግፍ 2x</a:t>
             </a:r>
           </a:p>
         </p:txBody>
@@ -3434,7 +3434,7 @@
                 <a:ea typeface="Ebrima"/>
                 <a:cs typeface="Ebrima"/>
               </a:rPr>
-              <a:t>አንተ ጉልበትህ አይዝልም አሃ (2x)</a:t>
+              <a:t>አንተ ጉልበትህ አይዝልም አሃ 2x</a:t>
             </a:r>
           </a:p>
         </p:txBody>
@@ -3501,7 +3501,7 @@
                 <a:ea typeface="Ebrima"/>
                 <a:cs typeface="Ebrima"/>
               </a:rPr>
-              <a:t>አትለዋወጥም አሃሃ (16x)</a:t>
+              <a:t>አትለዋወጥም አሃሃ 16x</a:t>
             </a:r>
           </a:p>
         </p:txBody>
@@ -3689,7 +3689,7 @@
                 <a:ea typeface="Ebrima"/>
                 <a:cs typeface="Ebrima"/>
               </a:rPr>
-              <a:t>እያየናቸው ከምድር ላይ ጠፉ (2x)</a:t>
+              <a:t>እያየናቸው ከምድር ላይ ጠፉ 2x</a:t>
             </a:r>
           </a:p>
         </p:txBody>
@@ -3998,7 +3998,7 @@
                 <a:ea typeface="Ebrima"/>
                 <a:cs typeface="Ebrima"/>
               </a:rPr>
-              <a:t>አትለዋወጥም አሃሃ (16x)</a:t>
+              <a:t>አትለዋወጥም አሃሃ 16x</a:t>
             </a:r>
           </a:p>
         </p:txBody>
@@ -4065,7 +4065,7 @@
                 <a:ea typeface="Ebrima"/>
                 <a:cs typeface="Ebrima"/>
               </a:rPr>
-              <a:t>ትልቅ ነህ ሰፊ ነህ ጥልቅ ነህ ረቂቅ (2x)</a:t>
+              <a:t>ትልቅ ነህ ሰፊ ነህ ጥልቅ ነህ ረቂቅ 2x</a:t>
             </a:r>
           </a:p>
         </p:txBody>
@@ -4186,7 +4186,7 @@
                 <a:ea typeface="Ebrima"/>
                 <a:cs typeface="Ebrima"/>
               </a:rPr>
-              <a:t>ያለቀ ሲጀምር አይቻለሁ አሃ (2x)</a:t>
+              <a:t>ያለቀ ሲጀምር አይቻለሁ አሃ 2x</a:t>
             </a:r>
           </a:p>
         </p:txBody>
@@ -4271,7 +4271,7 @@
                 <a:ea typeface="Ebrima"/>
                 <a:cs typeface="Ebrima"/>
               </a:rPr>
-              <a:t>ፍጥረት ሁሉ በመደነቅ የሚከታተለው (2x)</a:t>
+              <a:t>ፍጥረት ሁሉ በመደነቅ የሚከታተለው 2x</a:t>
             </a:r>
           </a:p>
         </p:txBody>
@@ -4392,7 +4392,7 @@
                 <a:ea typeface="Ebrima"/>
                 <a:cs typeface="Ebrima"/>
               </a:rPr>
-              <a:t>ልክህን አውቄ (4x)</a:t>
+              <a:t>ልክህን አውቄ 4x</a:t>
             </a:r>
           </a:p>
         </p:txBody>
@@ -4598,7 +4598,7 @@
                 <a:ea typeface="Ebrima"/>
                 <a:cs typeface="Ebrima"/>
               </a:rPr>
-              <a:t>ፍጥረት ሁሉ በመደነቅ የሚከታተለው (2x)</a:t>
+              <a:t>ፍጥረት ሁሉ በመደነቅ የሚከታተለው 2x</a:t>
             </a:r>
           </a:p>
         </p:txBody>
@@ -4719,7 +4719,7 @@
                 <a:ea typeface="Ebrima"/>
                 <a:cs typeface="Ebrima"/>
               </a:rPr>
-              <a:t>አንተ ጉልበትህ አይዝልም አሃ (2x)</a:t>
+              <a:t>አንተ ጉልበትህ አይዝልም አሃ 2x</a:t>
             </a:r>
           </a:p>
         </p:txBody>
@@ -4786,7 +4786,7 @@
                 <a:ea typeface="Ebrima"/>
                 <a:cs typeface="Ebrima"/>
               </a:rPr>
-              <a:t>አትለዋወጥም አሃሃ (16x)</a:t>
+              <a:t>አትለዋወጥም አሃሃ 16x</a:t>
             </a:r>
           </a:p>
         </p:txBody>
@@ -4853,7 +4853,7 @@
                 <a:ea typeface="Ebrima"/>
                 <a:cs typeface="Ebrima"/>
               </a:rPr>
-              <a:t>እኔ እኮ የሚገርመኝ ሁልጊዜ ያው መሆንህ ነው (2x)</a:t>
+              <a:t>እኔ እኮ የሚገርመኝ ሁልጊዜ ያው መሆንህ ነው 2x</a:t>
             </a:r>
           </a:p>
           <a:p>
@@ -4871,7 +4871,7 @@
                 <a:ea typeface="Ebrima"/>
                 <a:cs typeface="Ebrima"/>
               </a:rPr>
-              <a:t>እኔ እኮ የሚደንቀኝ ሁልጊዜ ያው መሆንህ ነው (8x)</a:t>
+              <a:t>እኔ እኮ የሚደንቀኝ ሁልጊዜ ያው መሆንህ ነው 8x</a:t>
             </a:r>
           </a:p>
         </p:txBody>
@@ -4992,7 +4992,7 @@
                 <a:ea typeface="Ebrima"/>
                 <a:cs typeface="Ebrima"/>
               </a:rPr>
-              <a:t>አንተ ጉልበትህ አይዝልም አሃ (2x)</a:t>
+              <a:t>አንተ ጉልበትህ አይዝልም አሃ 2x</a:t>
             </a:r>
           </a:p>
         </p:txBody>
@@ -5059,7 +5059,7 @@
                 <a:ea typeface="Ebrima"/>
                 <a:cs typeface="Ebrima"/>
               </a:rPr>
-              <a:t>አትለዋወጥም አሃሃ (16x)</a:t>
+              <a:t>አትለዋወጥም አሃሃ 16x</a:t>
             </a:r>
           </a:p>
         </p:txBody>
